--- a/output/week7/Week7_Presentation_BICT3202_OOAD.pptx
+++ b/output/week7/Week7_Presentation_BICT3202_OOAD.pptx
@@ -4350,7 +4350,7 @@
                 </a:solidFill>
                 <a:latin typeface="Open Sans"/>
               </a:rPr>
-              <a:t>Pending → Processing → (success: Paid | failure: Failed).</a:t>
+              <a:t>Pending -&gt; Processing -&gt; (success: Paid | failure: Failed).</a:t>
             </a:r>
           </a:p>
         </p:txBody>
@@ -5192,7 +5192,7 @@
                 </a:solidFill>
                 <a:latin typeface="Open Sans"/>
               </a:rPr>
-              <a:t>insertCard(): Idle → Card Inserted · ejectCard(): Card Inserted → Idle.</a:t>
+              <a:t>insertCard(): Idle -&gt; Card Inserted · ejectCard(): Card Inserted -&gt; Idle.</a:t>
             </a:r>
           </a:p>
         </p:txBody>
@@ -7287,7 +7287,7 @@
                 </a:solidFill>
                 <a:latin typeface="Open Sans"/>
               </a:rPr>
-              <a:t>shows Delivered → Cancelled, which may not make business sense.</a:t>
+              <a:t>shows Delivered -&gt; Cancelled, which may not make business sense.</a:t>
             </a:r>
           </a:p>
           <a:p>
@@ -7324,7 +7324,7 @@
                 </a:solidFill>
                 <a:latin typeface="Open Sans"/>
               </a:rPr>
-              <a:t>Pending/Paid/Processing → Cancelled; Shipped/Delivered → Return process.</a:t>
+              <a:t>Pending/Paid/Processing -&gt; Cancelled; Shipped/Delivered -&gt; Return process.</a:t>
             </a:r>
           </a:p>
           <a:p>
@@ -7902,7 +7902,7 @@
                 </a:solidFill>
                 <a:latin typeface="Open Sans"/>
               </a:rPr>
-              <a:t>Requested → Confirmed → Checked In → Waiting → With Doctor → Completed (or Cancelled).</a:t>
+              <a:t>Requested -&gt; Confirmed -&gt; Checked In -&gt; Waiting -&gt; With Doctor -&gt; Completed (or Cancelled).</a:t>
             </a:r>
           </a:p>
         </p:txBody>
@@ -9168,7 +9168,7 @@
                 </a:solidFill>
                 <a:latin typeface="Open Sans"/>
               </a:rPr>
-              <a:t>Order #1001 → Paid · #1002 → Pending · #1003 → Shipped</a:t>
+              <a:t>Order #1001 -&gt; Paid · #1002 -&gt; Pending · #1003 -&gt; Shipped</a:t>
             </a:r>
             <a:r>
               <a:rPr sz="1700">
@@ -9862,7 +9862,7 @@
                 </a:solidFill>
                 <a:latin typeface="Open Sans"/>
               </a:rPr>
-              <a:t>Pending → (PaymentReceived) → Paid</a:t>
+              <a:t>Pending -&gt; (PaymentReceived) -&gt; Paid</a:t>
             </a:r>
           </a:p>
           <a:p>
@@ -9890,7 +9890,7 @@
                 </a:solidFill>
                 <a:latin typeface="Open Sans"/>
               </a:rPr>
-              <a:t>Paid → (Dispatched) → Shipped</a:t>
+              <a:t>Paid -&gt; (Dispatched) -&gt; Shipped</a:t>
             </a:r>
           </a:p>
           <a:p>
@@ -10450,7 +10450,7 @@
                 </a:solidFill>
                 <a:latin typeface="Open Sans"/>
               </a:rPr>
-              <a:t>Red → Green → Yellow → Red; at an intersection, two controllers coordinate concurrently.</a:t>
+              <a:t>Red -&gt; Green -&gt; Yellow -&gt; Red; at an intersection, two controllers coordinate concurrently.</a:t>
             </a:r>
           </a:p>
         </p:txBody>
@@ -11503,7 +11503,7 @@
                 </a:solidFill>
                 <a:latin typeface="Open Sans"/>
               </a:rPr>
-              <a:t>— Delivered → Paid may make no sense.</a:t>
+              <a:t>— Delivered -&gt; Paid may make no sense.</a:t>
             </a:r>
           </a:p>
           <a:p>
@@ -12302,7 +12302,7 @@
                 </a:solidFill>
                 <a:latin typeface="Open Sans"/>
               </a:rPr>
-              <a:t>Object → state → event → transition → new state — the heart of dynamic modelling.</a:t>
+              <a:t>Object -&gt; state -&gt; event -&gt; transition -&gt; new state — the heart of dynamic modelling.</a:t>
             </a:r>
           </a:p>
         </p:txBody>
@@ -14692,7 +14692,7 @@
                 </a:solidFill>
                 <a:latin typeface="Open Sans"/>
               </a:rPr>
-              <a:t>Pending → Paid → Processing → Shipped → Delivered — read it as a story.</a:t>
+              <a:t>Pending -&gt; Paid -&gt; Processing -&gt; Shipped -&gt; Delivered — read it as a story.</a:t>
             </a:r>
           </a:p>
         </p:txBody>
@@ -15534,7 +15534,7 @@
                 </a:solidFill>
                 <a:latin typeface="Open Sans"/>
               </a:rPr>
-              <a:t>[balance sufficient] → Cash Dispensed · [balance insufficient] → Insufficient Funds.</a:t>
+              <a:t>[balance sufficient] -&gt; Cash Dispensed · [balance insufficient] -&gt; Insufficient Funds.</a:t>
             </a:r>
           </a:p>
         </p:txBody>
